--- a/public/fun/cards/finance/finance-44.pptx
+++ b/public/fun/cards/finance/finance-44.pptx
@@ -3085,7 +3085,7 @@
     <p:bg>
       <p:bgPr>
         <a:solidFill>
-          <a:srgbClr val="547AA6"/>
+          <a:srgbClr val="B5123E"/>
         </a:solidFill>
         <a:effectLst/>
       </p:bgPr>
@@ -3099,38 +3099,20 @@
       <p:grpSpPr/>
       <p:sp>
         <p:nvSpPr>
-          <p:cNvPr id="2" name="Freeform 1"/>
+          <p:cNvPr id="2" name="Rectangle 1"/>
           <p:cNvSpPr/>
           <p:nvPr/>
         </p:nvSpPr>
         <p:spPr>
           <a:xfrm>
-            <a:off x="1944000" y="540000"/>
-            <a:ext cx="1296000" cy="1260000"/>
+            <a:off x="252000" y="144000"/>
+            <a:ext cx="201600" cy="21600"/>
           </a:xfrm>
-          <a:custGeom>
+          <a:prstGeom prst="rect">
             <a:avLst/>
-            <a:gdLst/>
-            <a:ahLst/>
-            <a:cxnLst/>
-            <a:rect l="l" t="t" r="r" b="b"/>
-            <a:pathLst>
-              <a:path w="1296000" h="1260000">
-                <a:moveTo>
-                  <a:pt x="1296000" y="1260000"/>
-                </a:moveTo>
-                <a:lnTo>
-                  <a:pt x="1296000" y="0"/>
-                </a:lnTo>
-                <a:lnTo>
-                  <a:pt x="0" y="1260000"/>
-                </a:lnTo>
-                <a:close/>
-              </a:path>
-            </a:pathLst>
-          </a:custGeom>
+          </a:prstGeom>
           <a:solidFill>
-            <a:srgbClr val="D3DFEE"/>
+            <a:srgbClr val="FFFFFF"/>
           </a:solidFill>
           <a:ln>
             <a:noFill/>
@@ -3146,130 +3128,124 @@
       </p:sp>
       <p:sp>
         <p:nvSpPr>
-          <p:cNvPr id="3" name="Freeform 2"/>
-          <p:cNvSpPr/>
+          <p:cNvPr id="3" name="텍스트"/>
+          <p:cNvSpPr txBox="1"/>
           <p:nvPr/>
         </p:nvSpPr>
         <p:spPr>
           <a:xfrm>
-            <a:off x="2520000" y="1080000"/>
-            <a:ext cx="720000" cy="720000"/>
+            <a:off x="252000" y="273600"/>
+            <a:ext cx="2160000" cy="360000"/>
           </a:xfrm>
-          <a:custGeom>
+          <a:prstGeom prst="rect">
             <a:avLst/>
-            <a:gdLst/>
-            <a:ahLst/>
-            <a:cxnLst/>
-            <a:rect l="l" t="t" r="r" b="b"/>
-            <a:pathLst>
-              <a:path w="720000" h="720000">
-                <a:moveTo>
-                  <a:pt x="720000" y="720000"/>
-                </a:moveTo>
-                <a:lnTo>
-                  <a:pt x="720000" y="0"/>
-                </a:lnTo>
-                <a:lnTo>
-                  <a:pt x="0" y="720000"/>
-                </a:lnTo>
-                <a:close/>
-              </a:path>
-            </a:pathLst>
-          </a:custGeom>
-          <a:solidFill>
-            <a:srgbClr val="6F8FB4">
-              <a:alpha val="90000"/>
-            </a:srgbClr>
-          </a:solidFill>
-          <a:ln>
-            <a:noFill/>
-          </a:ln>
+          </a:prstGeom>
+          <a:noFill/>
         </p:spPr>
         <p:txBody>
-          <a:bodyPr rtlCol="0" anchor="ctr"/>
-          <a:lstStyle/>
-          <a:p>
-            <a:pPr algn="ctr"/>
-          </a:p>
-        </p:txBody>
-      </p:sp>
-      <p:sp>
-        <p:nvSpPr>
-          <p:cNvPr id="4" name="Freeform 3"/>
-          <p:cNvSpPr/>
+          <a:bodyPr wrap="square" lIns="0" rIns="0" tIns="0" bIns="0" anchor="t">
+            <a:spAutoFit/>
+          </a:bodyPr>
+          <a:lstStyle/>
+          <a:p>
+            <a:pPr algn="l">
+              <a:lnSpc>
+                <a:spcPts val="3190"/>
+              </a:lnSpc>
+            </a:pPr>
+            <a:r>
+              <a:rPr sz="2200" b="1">
+                <a:solidFill>
+                  <a:srgbClr val="FFFFFF"/>
+                </a:solidFill>
+                <a:latin typeface="맑은 고딕"/>
+                <a:ea typeface="맑은 고딕"/>
+              </a:rPr>
+              <a:t>연주혁</a:t>
+            </a:r>
+          </a:p>
+        </p:txBody>
+      </p:sp>
+      <p:sp>
+        <p:nvSpPr>
+          <p:cNvPr id="4" name="텍스트"/>
+          <p:cNvSpPr txBox="1"/>
           <p:nvPr/>
         </p:nvSpPr>
         <p:spPr>
           <a:xfrm>
-            <a:off x="2861424" y="1353456"/>
-            <a:ext cx="181152" cy="239760"/>
+            <a:off x="252000" y="676800"/>
+            <a:ext cx="2160000" cy="171451"/>
           </a:xfrm>
-          <a:custGeom>
+          <a:prstGeom prst="rect">
             <a:avLst/>
-            <a:gdLst/>
-            <a:ahLst/>
-            <a:cxnLst/>
-            <a:rect l="l" t="t" r="r" b="b"/>
-            <a:pathLst>
-              <a:path w="181152" h="239760">
-                <a:moveTo>
-                  <a:pt x="0" y="26640"/>
-                </a:moveTo>
-                <a:lnTo>
-                  <a:pt x="90576" y="0"/>
-                </a:lnTo>
-                <a:lnTo>
-                  <a:pt x="181152" y="26640"/>
-                </a:lnTo>
-                <a:lnTo>
-                  <a:pt x="181152" y="127872"/>
-                </a:lnTo>
-                <a:lnTo>
-                  <a:pt x="90576" y="239760"/>
-                </a:lnTo>
-                <a:lnTo>
-                  <a:pt x="0" y="127872"/>
-                </a:lnTo>
-                <a:close/>
-              </a:path>
-            </a:pathLst>
-          </a:custGeom>
-          <a:solidFill>
-            <a:srgbClr val="595959"/>
-          </a:solidFill>
-          <a:ln>
-            <a:noFill/>
-          </a:ln>
+          </a:prstGeom>
+          <a:noFill/>
         </p:spPr>
         <p:txBody>
-          <a:bodyPr rtlCol="0" anchor="ctr"/>
-          <a:lstStyle/>
-          <a:p>
-            <a:pPr algn="ctr"/>
-          </a:p>
-        </p:txBody>
-      </p:sp>
-      <p:cxnSp>
-        <p:nvCxnSpPr>
-          <p:cNvPr id="5" name="Connector 4"/>
-          <p:cNvCxnSpPr/>
+          <a:bodyPr wrap="square" lIns="0" rIns="0" tIns="0" bIns="0" anchor="t">
+            <a:spAutoFit/>
+          </a:bodyPr>
+          <a:lstStyle/>
+          <a:p>
+            <a:pPr algn="l">
+              <a:lnSpc>
+                <a:spcPts val="1305"/>
+              </a:lnSpc>
+            </a:pPr>
+            <a:r>
+              <a:rPr sz="900" b="0">
+                <a:solidFill>
+                  <a:srgbClr val="EFCBD5"/>
+                </a:solidFill>
+                <a:latin typeface="맑은 고딕"/>
+                <a:ea typeface="맑은 고딕"/>
+              </a:rPr>
+              <a:t>세무사</a:t>
+            </a:r>
+          </a:p>
+        </p:txBody>
+      </p:sp>
+      <p:sp>
+        <p:nvSpPr>
+          <p:cNvPr id="5" name="텍스트"/>
+          <p:cNvSpPr txBox="1"/>
           <p:nvPr/>
-        </p:nvCxnSpPr>
+        </p:nvSpPr>
         <p:spPr>
           <a:xfrm>
-            <a:off x="2914704" y="1476000"/>
-            <a:ext cx="29304" cy="31968"/>
+            <a:off x="1548000" y="230400"/>
+            <a:ext cx="1440000" cy="123826"/>
           </a:xfrm>
-          <a:prstGeom prst="line">
+          <a:prstGeom prst="rect">
             <a:avLst/>
           </a:prstGeom>
-          <a:ln w="18648">
-            <a:solidFill>
-              <a:srgbClr val="F7F7F7"/>
-            </a:solidFill>
-          </a:ln>
+          <a:noFill/>
         </p:spPr>
-      </p:cxnSp>
+        <p:txBody>
+          <a:bodyPr wrap="square" lIns="0" rIns="0" tIns="0" bIns="0" anchor="t">
+            <a:spAutoFit/>
+          </a:bodyPr>
+          <a:lstStyle/>
+          <a:p>
+            <a:pPr algn="r">
+              <a:lnSpc>
+                <a:spcPts val="942"/>
+              </a:lnSpc>
+            </a:pPr>
+            <a:r>
+              <a:rPr sz="650" b="1" spc="200">
+                <a:solidFill>
+                  <a:srgbClr val="EFCBD5"/>
+                </a:solidFill>
+                <a:latin typeface="맑은 고딕"/>
+                <a:ea typeface="맑은 고딕"/>
+              </a:rPr>
+              <a:t>회사 · 사무소 이름</a:t>
+            </a:r>
+          </a:p>
+        </p:txBody>
+      </p:sp>
       <p:cxnSp>
         <p:nvCxnSpPr>
           <p:cNvPr id="6" name="Connector 5"/>
@@ -3277,16 +3253,16 @@
           <p:nvPr/>
         </p:nvCxnSpPr>
         <p:spPr>
-          <a:xfrm flipV="1">
-            <a:off x="2944008" y="1444032"/>
-            <a:ext cx="50616" cy="63936"/>
+          <a:xfrm>
+            <a:off x="252000" y="1051200"/>
+            <a:ext cx="2736000" cy="0"/>
           </a:xfrm>
           <a:prstGeom prst="line">
             <a:avLst/>
           </a:prstGeom>
-          <a:ln w="18648">
+          <a:ln w="5760">
             <a:solidFill>
-              <a:srgbClr val="F7F7F7"/>
+              <a:srgbClr val="D3718B"/>
             </a:solidFill>
           </a:ln>
         </p:spPr>
@@ -3299,8 +3275,8 @@
         </p:nvSpPr>
         <p:spPr>
           <a:xfrm>
-            <a:off x="252000" y="201600"/>
-            <a:ext cx="1800000" cy="100800"/>
+            <a:off x="252000" y="1123200"/>
+            <a:ext cx="576000" cy="99061"/>
           </a:xfrm>
           <a:prstGeom prst="rect">
             <a:avLst/>
@@ -3315,18 +3291,18 @@
           <a:p>
             <a:pPr algn="l">
               <a:lnSpc>
-                <a:spcPts val="1087"/>
+                <a:spcPts val="754"/>
               </a:lnSpc>
             </a:pPr>
             <a:r>
-              <a:rPr sz="750" b="1" spc="150">
+              <a:rPr sz="520" b="1" spc="150">
                 <a:solidFill>
-                  <a:srgbClr val="FFFFFF"/>
+                  <a:srgbClr val="EFCBD5"/>
                 </a:solidFill>
                 <a:latin typeface="맑은 고딕"/>
                 <a:ea typeface="맑은 고딕"/>
               </a:rPr>
-              <a:t>회사 · 사무소 이름</a:t>
+              <a:t>TEL</a:t>
             </a:r>
           </a:p>
         </p:txBody>
@@ -3339,8 +3315,8 @@
         </p:nvSpPr>
         <p:spPr>
           <a:xfrm>
-            <a:off x="252000" y="360000"/>
-            <a:ext cx="2016000" cy="313692"/>
+            <a:off x="900000" y="1101600"/>
+            <a:ext cx="2088000" cy="142876"/>
           </a:xfrm>
           <a:prstGeom prst="rect">
             <a:avLst/>
@@ -3355,160 +3331,11 @@
           <a:p>
             <a:pPr algn="l">
               <a:lnSpc>
-                <a:spcPts val="2755"/>
+                <a:spcPts val="1087"/>
               </a:lnSpc>
             </a:pPr>
             <a:r>
-              <a:rPr sz="1900" b="1" spc="50">
-                <a:solidFill>
-                  <a:srgbClr val="FFFFFF"/>
-                </a:solidFill>
-                <a:latin typeface="맑은 고딕"/>
-                <a:ea typeface="맑은 고딕"/>
-              </a:rPr>
-              <a:t>연주혁</a:t>
-            </a:r>
-          </a:p>
-        </p:txBody>
-      </p:sp>
-      <p:sp>
-        <p:nvSpPr>
-          <p:cNvPr id="9" name="텍스트"/>
-          <p:cNvSpPr txBox="1"/>
-          <p:nvPr/>
-        </p:nvSpPr>
-        <p:spPr>
-          <a:xfrm>
-            <a:off x="252000" y="655200"/>
-            <a:ext cx="1872000" cy="122400"/>
-          </a:xfrm>
-          <a:prstGeom prst="rect">
-            <a:avLst/>
-          </a:prstGeom>
-          <a:noFill/>
-        </p:spPr>
-        <p:txBody>
-          <a:bodyPr wrap="square" lIns="0" rIns="0" tIns="0" bIns="0" anchor="t">
-            <a:spAutoFit/>
-          </a:bodyPr>
-          <a:lstStyle/>
-          <a:p>
-            <a:pPr algn="l">
-              <a:lnSpc>
-                <a:spcPts val="1232"/>
-              </a:lnSpc>
-            </a:pPr>
-            <a:r>
-              <a:rPr sz="850" b="1">
-                <a:solidFill>
-                  <a:srgbClr val="FFFFFF"/>
-                </a:solidFill>
-                <a:latin typeface="맑은 고딕"/>
-                <a:ea typeface="맑은 고딕"/>
-              </a:rPr>
-              <a:t>세무사</a:t>
-            </a:r>
-          </a:p>
-        </p:txBody>
-      </p:sp>
-      <p:sp>
-        <p:nvSpPr>
-          <p:cNvPr id="10" name="Rectangle 9"/>
-          <p:cNvSpPr/>
-          <p:nvPr/>
-        </p:nvSpPr>
-        <p:spPr>
-          <a:xfrm>
-            <a:off x="252000" y="864000"/>
-            <a:ext cx="230400" cy="14400"/>
-          </a:xfrm>
-          <a:prstGeom prst="rect">
-            <a:avLst/>
-          </a:prstGeom>
-          <a:solidFill>
-            <a:srgbClr val="D3DFEE"/>
-          </a:solidFill>
-          <a:ln>
-            <a:noFill/>
-          </a:ln>
-        </p:spPr>
-        <p:txBody>
-          <a:bodyPr rtlCol="0" anchor="ctr"/>
-          <a:lstStyle/>
-          <a:p>
-            <a:pPr algn="ctr"/>
-          </a:p>
-        </p:txBody>
-      </p:sp>
-      <p:sp>
-        <p:nvSpPr>
-          <p:cNvPr id="11" name="텍스트"/>
-          <p:cNvSpPr txBox="1"/>
-          <p:nvPr/>
-        </p:nvSpPr>
-        <p:spPr>
-          <a:xfrm>
-            <a:off x="252000" y="1044000"/>
-            <a:ext cx="122400" cy="168911"/>
-          </a:xfrm>
-          <a:prstGeom prst="rect">
-            <a:avLst/>
-          </a:prstGeom>
-          <a:noFill/>
-        </p:spPr>
-        <p:txBody>
-          <a:bodyPr wrap="square" lIns="0" rIns="0" tIns="0" bIns="0" anchor="t">
-            <a:spAutoFit/>
-          </a:bodyPr>
-          <a:lstStyle/>
-          <a:p>
-            <a:pPr algn="l">
-              <a:lnSpc>
-                <a:spcPts val="1015"/>
-              </a:lnSpc>
-            </a:pPr>
-            <a:r>
-              <a:rPr sz="700" b="1">
-                <a:solidFill>
-                  <a:srgbClr val="FFFFFF"/>
-                </a:solidFill>
-                <a:latin typeface="맑은 고딕"/>
-                <a:ea typeface="맑은 고딕"/>
-              </a:rPr>
-              <a:t>T</a:t>
-            </a:r>
-          </a:p>
-        </p:txBody>
-      </p:sp>
-      <p:sp>
-        <p:nvSpPr>
-          <p:cNvPr id="12" name="텍스트"/>
-          <p:cNvSpPr txBox="1"/>
-          <p:nvPr/>
-        </p:nvSpPr>
-        <p:spPr>
-          <a:xfrm>
-            <a:off x="396000" y="1044000"/>
-            <a:ext cx="1584000" cy="168911"/>
-          </a:xfrm>
-          <a:prstGeom prst="rect">
-            <a:avLst/>
-          </a:prstGeom>
-          <a:noFill/>
-        </p:spPr>
-        <p:txBody>
-          <a:bodyPr wrap="square" lIns="0" rIns="0" tIns="0" bIns="0" anchor="t">
-            <a:spAutoFit/>
-          </a:bodyPr>
-          <a:lstStyle/>
-          <a:p>
-            <a:pPr algn="l">
-              <a:lnSpc>
-                <a:spcPts val="1015"/>
-              </a:lnSpc>
-            </a:pPr>
-            <a:r>
-              <a:rPr sz="700" b="0">
+              <a:rPr sz="750" b="0">
                 <a:solidFill>
                   <a:srgbClr val="FFFFFF"/>
                 </a:solidFill>
@@ -3520,16 +3347,37 @@
           </a:p>
         </p:txBody>
       </p:sp>
-      <p:sp>
-        <p:nvSpPr>
-          <p:cNvPr id="13" name="텍스트"/>
+      <p:cxnSp>
+        <p:nvCxnSpPr>
+          <p:cNvPr id="9" name="Connector 8"/>
+          <p:cNvCxnSpPr/>
+          <p:nvPr/>
+        </p:nvCxnSpPr>
+        <p:spPr>
+          <a:xfrm>
+            <a:off x="252000" y="1274400"/>
+            <a:ext cx="2736000" cy="0"/>
+          </a:xfrm>
+          <a:prstGeom prst="line">
+            <a:avLst/>
+          </a:prstGeom>
+          <a:ln w="5760">
+            <a:solidFill>
+              <a:srgbClr val="D3718B"/>
+            </a:solidFill>
+          </a:ln>
+        </p:spPr>
+      </p:cxnSp>
+      <p:sp>
+        <p:nvSpPr>
+          <p:cNvPr id="10" name="텍스트"/>
           <p:cNvSpPr txBox="1"/>
           <p:nvPr/>
         </p:nvSpPr>
         <p:spPr>
           <a:xfrm>
-            <a:off x="252000" y="1212911"/>
-            <a:ext cx="122400" cy="168911"/>
+            <a:off x="252000" y="1346400"/>
+            <a:ext cx="576000" cy="99061"/>
           </a:xfrm>
           <a:prstGeom prst="rect">
             <a:avLst/>
@@ -3544,32 +3392,32 @@
           <a:p>
             <a:pPr algn="l">
               <a:lnSpc>
-                <a:spcPts val="1015"/>
+                <a:spcPts val="754"/>
               </a:lnSpc>
             </a:pPr>
             <a:r>
-              <a:rPr sz="700" b="1">
+              <a:rPr sz="520" b="1" spc="150">
                 <a:solidFill>
-                  <a:srgbClr val="FFFFFF"/>
+                  <a:srgbClr val="EFCBD5"/>
                 </a:solidFill>
                 <a:latin typeface="맑은 고딕"/>
                 <a:ea typeface="맑은 고딕"/>
               </a:rPr>
-              <a:t>E</a:t>
-            </a:r>
-          </a:p>
-        </p:txBody>
-      </p:sp>
-      <p:sp>
-        <p:nvSpPr>
-          <p:cNvPr id="14" name="텍스트"/>
+              <a:t>MAIL</a:t>
+            </a:r>
+          </a:p>
+        </p:txBody>
+      </p:sp>
+      <p:sp>
+        <p:nvSpPr>
+          <p:cNvPr id="11" name="텍스트"/>
           <p:cNvSpPr txBox="1"/>
           <p:nvPr/>
         </p:nvSpPr>
         <p:spPr>
           <a:xfrm>
-            <a:off x="396000" y="1212911"/>
-            <a:ext cx="1584000" cy="168911"/>
+            <a:off x="900000" y="1324800"/>
+            <a:ext cx="2088000" cy="142876"/>
           </a:xfrm>
           <a:prstGeom prst="rect">
             <a:avLst/>
@@ -3584,11 +3432,11 @@
           <a:p>
             <a:pPr algn="l">
               <a:lnSpc>
-                <a:spcPts val="1015"/>
+                <a:spcPts val="1087"/>
               </a:lnSpc>
             </a:pPr>
             <a:r>
-              <a:rPr sz="700" b="0">
+              <a:rPr sz="750" b="0">
                 <a:solidFill>
                   <a:srgbClr val="FFFFFF"/>
                 </a:solidFill>
@@ -3600,16 +3448,37 @@
           </a:p>
         </p:txBody>
       </p:sp>
-      <p:sp>
-        <p:nvSpPr>
-          <p:cNvPr id="15" name="텍스트"/>
+      <p:cxnSp>
+        <p:nvCxnSpPr>
+          <p:cNvPr id="12" name="Connector 11"/>
+          <p:cNvCxnSpPr/>
+          <p:nvPr/>
+        </p:nvCxnSpPr>
+        <p:spPr>
+          <a:xfrm>
+            <a:off x="252000" y="1497600"/>
+            <a:ext cx="2736000" cy="0"/>
+          </a:xfrm>
+          <a:prstGeom prst="line">
+            <a:avLst/>
+          </a:prstGeom>
+          <a:ln w="5760">
+            <a:solidFill>
+              <a:srgbClr val="D3718B"/>
+            </a:solidFill>
+          </a:ln>
+        </p:spPr>
+      </p:cxnSp>
+      <p:sp>
+        <p:nvSpPr>
+          <p:cNvPr id="13" name="텍스트"/>
           <p:cNvSpPr txBox="1"/>
           <p:nvPr/>
         </p:nvSpPr>
         <p:spPr>
           <a:xfrm>
-            <a:off x="252000" y="1381822"/>
-            <a:ext cx="122400" cy="168911"/>
+            <a:off x="252000" y="1569600"/>
+            <a:ext cx="576000" cy="99061"/>
           </a:xfrm>
           <a:prstGeom prst="rect">
             <a:avLst/>
@@ -3624,32 +3493,32 @@
           <a:p>
             <a:pPr algn="l">
               <a:lnSpc>
-                <a:spcPts val="1015"/>
+                <a:spcPts val="754"/>
               </a:lnSpc>
             </a:pPr>
             <a:r>
-              <a:rPr sz="700" b="1">
+              <a:rPr sz="520" b="1" spc="150">
                 <a:solidFill>
-                  <a:srgbClr val="FFFFFF"/>
+                  <a:srgbClr val="EFCBD5"/>
                 </a:solidFill>
                 <a:latin typeface="맑은 고딕"/>
                 <a:ea typeface="맑은 고딕"/>
               </a:rPr>
-              <a:t>A</a:t>
-            </a:r>
-          </a:p>
-        </p:txBody>
-      </p:sp>
-      <p:sp>
-        <p:nvSpPr>
-          <p:cNvPr id="16" name="텍스트"/>
+              <a:t>ADDR</a:t>
+            </a:r>
+          </a:p>
+        </p:txBody>
+      </p:sp>
+      <p:sp>
+        <p:nvSpPr>
+          <p:cNvPr id="14" name="텍스트"/>
           <p:cNvSpPr txBox="1"/>
           <p:nvPr/>
         </p:nvSpPr>
         <p:spPr>
           <a:xfrm>
-            <a:off x="396000" y="1381822"/>
-            <a:ext cx="1584000" cy="168911"/>
+            <a:off x="900000" y="1548000"/>
+            <a:ext cx="2088000" cy="142876"/>
           </a:xfrm>
           <a:prstGeom prst="rect">
             <a:avLst/>
@@ -3664,11 +3533,11 @@
           <a:p>
             <a:pPr algn="l">
               <a:lnSpc>
-                <a:spcPts val="1015"/>
+                <a:spcPts val="1087"/>
               </a:lnSpc>
             </a:pPr>
             <a:r>
-              <a:rPr sz="700" b="0">
+              <a:rPr sz="750" b="0">
                 <a:solidFill>
                   <a:srgbClr val="FFFFFF"/>
                 </a:solidFill>
@@ -3680,6 +3549,27 @@
           </a:p>
         </p:txBody>
       </p:sp>
+      <p:cxnSp>
+        <p:nvCxnSpPr>
+          <p:cNvPr id="15" name="Connector 14"/>
+          <p:cNvCxnSpPr/>
+          <p:nvPr/>
+        </p:nvCxnSpPr>
+        <p:spPr>
+          <a:xfrm>
+            <a:off x="252000" y="1720800"/>
+            <a:ext cx="2736000" cy="0"/>
+          </a:xfrm>
+          <a:prstGeom prst="line">
+            <a:avLst/>
+          </a:prstGeom>
+          <a:ln w="5760">
+            <a:solidFill>
+              <a:srgbClr val="D3718B"/>
+            </a:solidFill>
+          </a:ln>
+        </p:spPr>
+      </p:cxnSp>
     </p:spTree>
   </p:cSld>
   <p:clrMapOvr>
@@ -3694,7 +3584,7 @@
     <p:bg>
       <p:bgPr>
         <a:solidFill>
-          <a:srgbClr val="F1F5F9"/>
+          <a:srgbClr val="F8E7EC"/>
         </a:solidFill>
         <a:effectLst/>
       </p:bgPr>
@@ -3708,14 +3598,43 @@
       <p:grpSpPr/>
       <p:sp>
         <p:nvSpPr>
-          <p:cNvPr id="2" name="Freeform 1"/>
+          <p:cNvPr id="2" name="Rectangle 1"/>
           <p:cNvSpPr/>
           <p:nvPr/>
         </p:nvSpPr>
         <p:spPr>
           <a:xfrm>
-            <a:off x="2016000" y="576000"/>
-            <a:ext cx="1224000" cy="1224000"/>
+            <a:off x="0" y="0"/>
+            <a:ext cx="3240000" cy="1800000"/>
+          </a:xfrm>
+          <a:prstGeom prst="rect">
+            <a:avLst/>
+          </a:prstGeom>
+          <a:solidFill>
+            <a:srgbClr val="B5123E"/>
+          </a:solidFill>
+          <a:ln>
+            <a:noFill/>
+          </a:ln>
+        </p:spPr>
+        <p:txBody>
+          <a:bodyPr rtlCol="0" anchor="ctr"/>
+          <a:lstStyle/>
+          <a:p>
+            <a:pPr algn="ctr"/>
+          </a:p>
+        </p:txBody>
+      </p:sp>
+      <p:sp>
+        <p:nvSpPr>
+          <p:cNvPr id="3" name="Freeform 2"/>
+          <p:cNvSpPr/>
+          <p:nvPr/>
+        </p:nvSpPr>
+        <p:spPr>
+          <a:xfrm>
+            <a:off x="2412000" y="972000"/>
+            <a:ext cx="828000" cy="828000"/>
           </a:xfrm>
           <a:custGeom>
             <a:avLst/>
@@ -3724,61 +3643,91 @@
             <a:cxnLst/>
             <a:rect l="l" t="t" r="r" b="b"/>
             <a:pathLst>
-              <a:path w="1224000" h="1224000">
+              <a:path w="828000" h="828000">
                 <a:moveTo>
-                  <a:pt x="1224000" y="1224000"/>
+                  <a:pt x="828000" y="828000"/>
                 </a:moveTo>
                 <a:lnTo>
-                  <a:pt x="0" y="1224000"/>
+                  <a:pt x="0" y="828000"/>
                 </a:lnTo>
                 <a:lnTo>
-                  <a:pt x="7696" y="1086955"/>
+                  <a:pt x="1773" y="773846"/>
                 </a:lnTo>
                 <a:lnTo>
-                  <a:pt x="30688" y="951634"/>
+                  <a:pt x="7084" y="719924"/>
                 </a:lnTo>
                 <a:lnTo>
-                  <a:pt x="68687" y="819738"/>
+                  <a:pt x="15910" y="666465"/>
                 </a:lnTo>
                 <a:lnTo>
-                  <a:pt x="121214" y="692926"/>
+                  <a:pt x="28213" y="613698"/>
                 </a:lnTo>
                 <a:lnTo>
-                  <a:pt x="187610" y="572793"/>
+                  <a:pt x="43942" y="561848"/>
                 </a:lnTo>
                 <a:lnTo>
-                  <a:pt x="267038" y="460848"/>
+                  <a:pt x="63028" y="511138"/>
                 </a:lnTo>
                 <a:lnTo>
-                  <a:pt x="358501" y="358501"/>
+                  <a:pt x="85389" y="461785"/>
                 </a:lnTo>
                 <a:lnTo>
-                  <a:pt x="460848" y="267038"/>
+                  <a:pt x="110931" y="414000"/>
                 </a:lnTo>
                 <a:lnTo>
-                  <a:pt x="572793" y="187610"/>
+                  <a:pt x="139543" y="367988"/>
                 </a:lnTo>
                 <a:lnTo>
-                  <a:pt x="692926" y="121214"/>
+                  <a:pt x="171103" y="323946"/>
                 </a:lnTo>
                 <a:lnTo>
-                  <a:pt x="819738" y="68687"/>
+                  <a:pt x="205477" y="282062"/>
                 </a:lnTo>
                 <a:lnTo>
-                  <a:pt x="951634" y="30688"/>
+                  <a:pt x="242516" y="242516"/>
                 </a:lnTo>
                 <a:lnTo>
-                  <a:pt x="1086955" y="7696"/>
+                  <a:pt x="282062" y="205477"/>
                 </a:lnTo>
                 <a:lnTo>
-                  <a:pt x="1224000" y="0"/>
+                  <a:pt x="323946" y="171103"/>
+                </a:lnTo>
+                <a:lnTo>
+                  <a:pt x="367988" y="139543"/>
+                </a:lnTo>
+                <a:lnTo>
+                  <a:pt x="414000" y="110931"/>
+                </a:lnTo>
+                <a:lnTo>
+                  <a:pt x="461785" y="85389"/>
+                </a:lnTo>
+                <a:lnTo>
+                  <a:pt x="511138" y="63028"/>
+                </a:lnTo>
+                <a:lnTo>
+                  <a:pt x="561848" y="43942"/>
+                </a:lnTo>
+                <a:lnTo>
+                  <a:pt x="613698" y="28213"/>
+                </a:lnTo>
+                <a:lnTo>
+                  <a:pt x="666465" y="15910"/>
+                </a:lnTo>
+                <a:lnTo>
+                  <a:pt x="719924" y="7084"/>
+                </a:lnTo>
+                <a:lnTo>
+                  <a:pt x="773846" y="1773"/>
+                </a:lnTo>
+                <a:lnTo>
+                  <a:pt x="828000" y="0"/>
                 </a:lnTo>
                 <a:close/>
               </a:path>
             </a:pathLst>
           </a:custGeom>
           <a:solidFill>
-            <a:srgbClr val="6991BF"/>
+            <a:srgbClr val="C54668"/>
           </a:solidFill>
           <a:ln>
             <a:noFill/>
@@ -3794,198 +3743,14 @@
       </p:sp>
       <p:sp>
         <p:nvSpPr>
-          <p:cNvPr id="3" name="Freeform 2"/>
-          <p:cNvSpPr/>
+          <p:cNvPr id="4" name="텍스트"/>
+          <p:cNvSpPr txBox="1"/>
           <p:nvPr/>
         </p:nvSpPr>
         <p:spPr>
           <a:xfrm>
-            <a:off x="2520000" y="1080000"/>
-            <a:ext cx="720000" cy="720000"/>
-          </a:xfrm>
-          <a:custGeom>
-            <a:avLst/>
-            <a:gdLst/>
-            <a:ahLst/>
-            <a:cxnLst/>
-            <a:rect l="l" t="t" r="r" b="b"/>
-            <a:pathLst>
-              <a:path w="720000" h="720000">
-                <a:moveTo>
-                  <a:pt x="720000" y="720000"/>
-                </a:moveTo>
-                <a:lnTo>
-                  <a:pt x="0" y="720000"/>
-                </a:lnTo>
-                <a:lnTo>
-                  <a:pt x="4527" y="639386"/>
-                </a:lnTo>
-                <a:lnTo>
-                  <a:pt x="18052" y="559785"/>
-                </a:lnTo>
-                <a:lnTo>
-                  <a:pt x="40404" y="482199"/>
-                </a:lnTo>
-                <a:lnTo>
-                  <a:pt x="71302" y="407604"/>
-                </a:lnTo>
-                <a:lnTo>
-                  <a:pt x="110359" y="336937"/>
-                </a:lnTo>
-                <a:lnTo>
-                  <a:pt x="157081" y="271087"/>
-                </a:lnTo>
-                <a:lnTo>
-                  <a:pt x="210883" y="210883"/>
-                </a:lnTo>
-                <a:lnTo>
-                  <a:pt x="271087" y="157081"/>
-                </a:lnTo>
-                <a:lnTo>
-                  <a:pt x="336937" y="110359"/>
-                </a:lnTo>
-                <a:lnTo>
-                  <a:pt x="407604" y="71302"/>
-                </a:lnTo>
-                <a:lnTo>
-                  <a:pt x="482199" y="40404"/>
-                </a:lnTo>
-                <a:lnTo>
-                  <a:pt x="559785" y="18052"/>
-                </a:lnTo>
-                <a:lnTo>
-                  <a:pt x="639386" y="4527"/>
-                </a:lnTo>
-                <a:lnTo>
-                  <a:pt x="720000" y="0"/>
-                </a:lnTo>
-                <a:close/>
-              </a:path>
-            </a:pathLst>
-          </a:custGeom>
-          <a:solidFill>
-            <a:srgbClr val="E0E9F3"/>
-          </a:solidFill>
-          <a:ln>
-            <a:noFill/>
-          </a:ln>
-        </p:spPr>
-        <p:txBody>
-          <a:bodyPr rtlCol="0" anchor="ctr"/>
-          <a:lstStyle/>
-          <a:p>
-            <a:pPr algn="ctr"/>
-          </a:p>
-        </p:txBody>
-      </p:sp>
-      <p:sp>
-        <p:nvSpPr>
-          <p:cNvPr id="4" name="Freeform 3"/>
-          <p:cNvSpPr/>
-          <p:nvPr/>
-        </p:nvSpPr>
-        <p:spPr>
-          <a:xfrm>
-            <a:off x="2794320" y="1360080"/>
-            <a:ext cx="171360" cy="226800"/>
-          </a:xfrm>
-          <a:custGeom>
-            <a:avLst/>
-            <a:gdLst/>
-            <a:ahLst/>
-            <a:cxnLst/>
-            <a:rect l="l" t="t" r="r" b="b"/>
-            <a:pathLst>
-              <a:path w="171360" h="226800">
-                <a:moveTo>
-                  <a:pt x="0" y="25200"/>
-                </a:moveTo>
-                <a:lnTo>
-                  <a:pt x="85680" y="0"/>
-                </a:lnTo>
-                <a:lnTo>
-                  <a:pt x="171360" y="25200"/>
-                </a:lnTo>
-                <a:lnTo>
-                  <a:pt x="171360" y="120960"/>
-                </a:lnTo>
-                <a:lnTo>
-                  <a:pt x="85680" y="226800"/>
-                </a:lnTo>
-                <a:lnTo>
-                  <a:pt x="0" y="120960"/>
-                </a:lnTo>
-                <a:close/>
-              </a:path>
-            </a:pathLst>
-          </a:custGeom>
-          <a:solidFill>
-            <a:srgbClr val="FFFFFF"/>
-          </a:solidFill>
-          <a:ln>
-            <a:noFill/>
-          </a:ln>
-        </p:spPr>
-        <p:txBody>
-          <a:bodyPr rtlCol="0" anchor="ctr"/>
-          <a:lstStyle/>
-          <a:p>
-            <a:pPr algn="ctr"/>
-          </a:p>
-        </p:txBody>
-      </p:sp>
-      <p:cxnSp>
-        <p:nvCxnSpPr>
-          <p:cNvPr id="5" name="Connector 4"/>
-          <p:cNvCxnSpPr/>
-          <p:nvPr/>
-        </p:nvCxnSpPr>
-        <p:spPr>
-          <a:xfrm>
-            <a:off x="2844720" y="1476000"/>
-            <a:ext cx="27720" cy="30240"/>
-          </a:xfrm>
-          <a:prstGeom prst="line">
-            <a:avLst/>
-          </a:prstGeom>
-          <a:ln w="17640">
-            <a:solidFill>
-              <a:srgbClr val="808080"/>
-            </a:solidFill>
-          </a:ln>
-        </p:spPr>
-      </p:cxnSp>
-      <p:cxnSp>
-        <p:nvCxnSpPr>
-          <p:cNvPr id="6" name="Connector 5"/>
-          <p:cNvCxnSpPr/>
-          <p:nvPr/>
-        </p:nvCxnSpPr>
-        <p:spPr>
-          <a:xfrm flipV="1">
-            <a:off x="2872440" y="1445760"/>
-            <a:ext cx="47880" cy="60480"/>
-          </a:xfrm>
-          <a:prstGeom prst="line">
-            <a:avLst/>
-          </a:prstGeom>
-          <a:ln w="17640">
-            <a:solidFill>
-              <a:srgbClr val="808080"/>
-            </a:solidFill>
-          </a:ln>
-        </p:spPr>
-      </p:cxnSp>
-      <p:sp>
-        <p:nvSpPr>
-          <p:cNvPr id="7" name="텍스트"/>
-          <p:cNvSpPr txBox="1"/>
-          <p:nvPr/>
-        </p:nvSpPr>
-        <p:spPr>
-          <a:xfrm>
-            <a:off x="252000" y="324000"/>
-            <a:ext cx="1944000" cy="720000"/>
+            <a:off x="252000" y="432000"/>
+            <a:ext cx="2304000" cy="720000"/>
           </a:xfrm>
           <a:prstGeom prst="rect">
             <a:avLst/>
@@ -4000,13 +3765,13 @@
           <a:p>
             <a:pPr algn="l">
               <a:lnSpc>
-                <a:spcPts val="1739"/>
+                <a:spcPts val="1884"/>
               </a:lnSpc>
             </a:pPr>
             <a:r>
-              <a:rPr sz="1200" b="1">
+              <a:rPr sz="1300" b="1">
                 <a:solidFill>
-                  <a:srgbClr val="3A5E88"/>
+                  <a:srgbClr val="FFFFFF"/>
                 </a:solidFill>
                 <a:latin typeface="맑은 고딕"/>
                 <a:ea typeface="맑은 고딕"/>
@@ -4018,14 +3783,14 @@
       </p:sp>
       <p:sp>
         <p:nvSpPr>
-          <p:cNvPr id="8" name="텍스트"/>
+          <p:cNvPr id="5" name="텍스트"/>
           <p:cNvSpPr txBox="1"/>
           <p:nvPr/>
         </p:nvSpPr>
         <p:spPr>
           <a:xfrm>
             <a:off x="252000" y="1476000"/>
-            <a:ext cx="1440000" cy="108000"/>
+            <a:ext cx="1800000" cy="133351"/>
           </a:xfrm>
           <a:prstGeom prst="rect">
             <a:avLst/>
@@ -4040,13 +3805,13 @@
           <a:p>
             <a:pPr algn="l">
               <a:lnSpc>
-                <a:spcPts val="1087"/>
+                <a:spcPts val="1015"/>
               </a:lnSpc>
             </a:pPr>
             <a:r>
-              <a:rPr sz="750" b="1" spc="200">
+              <a:rPr sz="700" b="1" spc="200">
                 <a:solidFill>
-                  <a:srgbClr val="5C6E84"/>
+                  <a:srgbClr val="FFFFFF"/>
                 </a:solidFill>
                 <a:latin typeface="맑은 고딕"/>
                 <a:ea typeface="맑은 고딕"/>

--- a/public/fun/cards/finance/finance-44.pptx
+++ b/public/fun/cards/finance/finance-44.pptx
@@ -3105,8 +3105,8 @@
         </p:nvSpPr>
         <p:spPr>
           <a:xfrm>
-            <a:off x="252000" y="144000"/>
-            <a:ext cx="201600" cy="21600"/>
+            <a:off x="0" y="0"/>
+            <a:ext cx="3240000" cy="36000"/>
           </a:xfrm>
           <a:prstGeom prst="rect">
             <a:avLst/>
@@ -3134,8 +3134,8 @@
         </p:nvSpPr>
         <p:spPr>
           <a:xfrm>
-            <a:off x="252000" y="273600"/>
-            <a:ext cx="2160000" cy="360000"/>
+            <a:off x="252000" y="223200"/>
+            <a:ext cx="1296000" cy="237600"/>
           </a:xfrm>
           <a:prstGeom prst="rect">
             <a:avLst/>
@@ -3150,11 +3150,11 @@
           <a:p>
             <a:pPr algn="l">
               <a:lnSpc>
-                <a:spcPts val="3190"/>
+                <a:spcPts val="1957"/>
               </a:lnSpc>
             </a:pPr>
             <a:r>
-              <a:rPr sz="2200" b="1">
+              <a:rPr sz="1350" b="1" spc="120">
                 <a:solidFill>
                   <a:srgbClr val="FFFFFF"/>
                 </a:solidFill>
@@ -3174,8 +3174,8 @@
         </p:nvSpPr>
         <p:spPr>
           <a:xfrm>
-            <a:off x="252000" y="676800"/>
-            <a:ext cx="2160000" cy="171451"/>
+            <a:off x="252000" y="475200"/>
+            <a:ext cx="1296000" cy="133351"/>
           </a:xfrm>
           <a:prstGeom prst="rect">
             <a:avLst/>
@@ -3190,11 +3190,11 @@
           <a:p>
             <a:pPr algn="l">
               <a:lnSpc>
-                <a:spcPts val="1305"/>
+                <a:spcPts val="1015"/>
               </a:lnSpc>
             </a:pPr>
             <a:r>
-              <a:rPr sz="900" b="0">
+              <a:rPr sz="700" b="0">
                 <a:solidFill>
                   <a:srgbClr val="EFCBD5"/>
                 </a:solidFill>
@@ -3214,7 +3214,7 @@
         </p:nvSpPr>
         <p:spPr>
           <a:xfrm>
-            <a:off x="1548000" y="230400"/>
+            <a:off x="1548000" y="259200"/>
             <a:ext cx="1440000" cy="123826"/>
           </a:xfrm>
           <a:prstGeom prst="rect">
@@ -3234,7 +3234,7 @@
               </a:lnSpc>
             </a:pPr>
             <a:r>
-              <a:rPr sz="650" b="1" spc="200">
+              <a:rPr sz="650" b="1" spc="220">
                 <a:solidFill>
                   <a:srgbClr val="EFCBD5"/>
                 </a:solidFill>
@@ -3254,13 +3254,13 @@
         </p:nvCxnSpPr>
         <p:spPr>
           <a:xfrm>
-            <a:off x="252000" y="1051200"/>
+            <a:off x="252000" y="907200"/>
             <a:ext cx="2736000" cy="0"/>
           </a:xfrm>
           <a:prstGeom prst="line">
             <a:avLst/>
           </a:prstGeom>
-          <a:ln w="5760">
+          <a:ln w="3600">
             <a:solidFill>
               <a:srgbClr val="D3718B"/>
             </a:solidFill>
@@ -3275,8 +3275,8 @@
         </p:nvSpPr>
         <p:spPr>
           <a:xfrm>
-            <a:off x="252000" y="1123200"/>
-            <a:ext cx="576000" cy="99061"/>
+            <a:off x="252000" y="986400"/>
+            <a:ext cx="576000" cy="91441"/>
           </a:xfrm>
           <a:prstGeom prst="rect">
             <a:avLst/>
@@ -3291,11 +3291,11 @@
           <a:p>
             <a:pPr algn="l">
               <a:lnSpc>
-                <a:spcPts val="754"/>
+                <a:spcPts val="696"/>
               </a:lnSpc>
             </a:pPr>
             <a:r>
-              <a:rPr sz="520" b="1" spc="150">
+              <a:rPr sz="480" b="1" spc="160">
                 <a:solidFill>
                   <a:srgbClr val="EFCBD5"/>
                 </a:solidFill>
@@ -3315,8 +3315,8 @@
         </p:nvSpPr>
         <p:spPr>
           <a:xfrm>
-            <a:off x="900000" y="1101600"/>
-            <a:ext cx="2088000" cy="142876"/>
+            <a:off x="936000" y="968400"/>
+            <a:ext cx="2052000" cy="133351"/>
           </a:xfrm>
           <a:prstGeom prst="rect">
             <a:avLst/>
@@ -3331,11 +3331,11 @@
           <a:p>
             <a:pPr algn="l">
               <a:lnSpc>
-                <a:spcPts val="1087"/>
+                <a:spcPts val="1015"/>
               </a:lnSpc>
             </a:pPr>
             <a:r>
-              <a:rPr sz="750" b="0">
+              <a:rPr sz="700" b="0">
                 <a:solidFill>
                   <a:srgbClr val="FFFFFF"/>
                 </a:solidFill>
@@ -3355,13 +3355,13 @@
         </p:nvCxnSpPr>
         <p:spPr>
           <a:xfrm>
-            <a:off x="252000" y="1274400"/>
+            <a:off x="252000" y="1137600"/>
             <a:ext cx="2736000" cy="0"/>
           </a:xfrm>
           <a:prstGeom prst="line">
             <a:avLst/>
           </a:prstGeom>
-          <a:ln w="5760">
+          <a:ln w="3600">
             <a:solidFill>
               <a:srgbClr val="D3718B"/>
             </a:solidFill>
@@ -3376,8 +3376,8 @@
         </p:nvSpPr>
         <p:spPr>
           <a:xfrm>
-            <a:off x="252000" y="1346400"/>
-            <a:ext cx="576000" cy="99061"/>
+            <a:off x="252000" y="1216800"/>
+            <a:ext cx="576000" cy="91441"/>
           </a:xfrm>
           <a:prstGeom prst="rect">
             <a:avLst/>
@@ -3392,11 +3392,11 @@
           <a:p>
             <a:pPr algn="l">
               <a:lnSpc>
-                <a:spcPts val="754"/>
+                <a:spcPts val="696"/>
               </a:lnSpc>
             </a:pPr>
             <a:r>
-              <a:rPr sz="520" b="1" spc="150">
+              <a:rPr sz="480" b="1" spc="160">
                 <a:solidFill>
                   <a:srgbClr val="EFCBD5"/>
                 </a:solidFill>
@@ -3416,8 +3416,8 @@
         </p:nvSpPr>
         <p:spPr>
           <a:xfrm>
-            <a:off x="900000" y="1324800"/>
-            <a:ext cx="2088000" cy="142876"/>
+            <a:off x="936000" y="1198800"/>
+            <a:ext cx="2052000" cy="133351"/>
           </a:xfrm>
           <a:prstGeom prst="rect">
             <a:avLst/>
@@ -3432,11 +3432,11 @@
           <a:p>
             <a:pPr algn="l">
               <a:lnSpc>
-                <a:spcPts val="1087"/>
+                <a:spcPts val="1015"/>
               </a:lnSpc>
             </a:pPr>
             <a:r>
-              <a:rPr sz="750" b="0">
+              <a:rPr sz="700" b="0">
                 <a:solidFill>
                   <a:srgbClr val="FFFFFF"/>
                 </a:solidFill>
@@ -3456,13 +3456,13 @@
         </p:nvCxnSpPr>
         <p:spPr>
           <a:xfrm>
-            <a:off x="252000" y="1497600"/>
+            <a:off x="252000" y="1368000"/>
             <a:ext cx="2736000" cy="0"/>
           </a:xfrm>
           <a:prstGeom prst="line">
             <a:avLst/>
           </a:prstGeom>
-          <a:ln w="5760">
+          <a:ln w="3600">
             <a:solidFill>
               <a:srgbClr val="D3718B"/>
             </a:solidFill>
@@ -3477,8 +3477,8 @@
         </p:nvSpPr>
         <p:spPr>
           <a:xfrm>
-            <a:off x="252000" y="1569600"/>
-            <a:ext cx="576000" cy="99061"/>
+            <a:off x="252000" y="1447200"/>
+            <a:ext cx="576000" cy="91441"/>
           </a:xfrm>
           <a:prstGeom prst="rect">
             <a:avLst/>
@@ -3493,11 +3493,11 @@
           <a:p>
             <a:pPr algn="l">
               <a:lnSpc>
-                <a:spcPts val="754"/>
+                <a:spcPts val="696"/>
               </a:lnSpc>
             </a:pPr>
             <a:r>
-              <a:rPr sz="520" b="1" spc="150">
+              <a:rPr sz="480" b="1" spc="160">
                 <a:solidFill>
                   <a:srgbClr val="EFCBD5"/>
                 </a:solidFill>
@@ -3517,8 +3517,8 @@
         </p:nvSpPr>
         <p:spPr>
           <a:xfrm>
-            <a:off x="900000" y="1548000"/>
-            <a:ext cx="2088000" cy="142876"/>
+            <a:off x="936000" y="1429200"/>
+            <a:ext cx="2052000" cy="133351"/>
           </a:xfrm>
           <a:prstGeom prst="rect">
             <a:avLst/>
@@ -3533,11 +3533,11 @@
           <a:p>
             <a:pPr algn="l">
               <a:lnSpc>
-                <a:spcPts val="1087"/>
+                <a:spcPts val="1015"/>
               </a:lnSpc>
             </a:pPr>
             <a:r>
-              <a:rPr sz="750" b="0">
+              <a:rPr sz="700" b="0">
                 <a:solidFill>
                   <a:srgbClr val="FFFFFF"/>
                 </a:solidFill>
@@ -3557,13 +3557,13 @@
         </p:nvCxnSpPr>
         <p:spPr>
           <a:xfrm>
-            <a:off x="252000" y="1720800"/>
+            <a:off x="252000" y="1598400"/>
             <a:ext cx="2736000" cy="0"/>
           </a:xfrm>
           <a:prstGeom prst="line">
             <a:avLst/>
           </a:prstGeom>
-          <a:ln w="5760">
+          <a:ln w="3600">
             <a:solidFill>
               <a:srgbClr val="D3718B"/>
             </a:solidFill>
@@ -3598,14 +3598,54 @@
       <p:grpSpPr/>
       <p:sp>
         <p:nvSpPr>
-          <p:cNvPr id="2" name="Rectangle 1"/>
+          <p:cNvPr id="2" name="텍스트"/>
+          <p:cNvSpPr txBox="1"/>
+          <p:nvPr/>
+        </p:nvSpPr>
+        <p:spPr>
+          <a:xfrm>
+            <a:off x="252000" y="252000"/>
+            <a:ext cx="1080000" cy="99061"/>
+          </a:xfrm>
+          <a:prstGeom prst="rect">
+            <a:avLst/>
+          </a:prstGeom>
+          <a:noFill/>
+        </p:spPr>
+        <p:txBody>
+          <a:bodyPr wrap="square" lIns="0" rIns="0" tIns="0" bIns="0" anchor="t">
+            <a:spAutoFit/>
+          </a:bodyPr>
+          <a:lstStyle/>
+          <a:p>
+            <a:pPr algn="l">
+              <a:lnSpc>
+                <a:spcPts val="754"/>
+              </a:lnSpc>
+            </a:pPr>
+            <a:r>
+              <a:rPr sz="520" b="1" spc="240">
+                <a:solidFill>
+                  <a:srgbClr val="501429"/>
+                </a:solidFill>
+                <a:latin typeface="맑은 고딕"/>
+                <a:ea typeface="맑은 고딕"/>
+              </a:rPr>
+              <a:t>상담 분야</a:t>
+            </a:r>
+          </a:p>
+        </p:txBody>
+      </p:sp>
+      <p:sp>
+        <p:nvSpPr>
+          <p:cNvPr id="3" name="Rectangle 2"/>
           <p:cNvSpPr/>
           <p:nvPr/>
         </p:nvSpPr>
         <p:spPr>
           <a:xfrm>
-            <a:off x="0" y="0"/>
-            <a:ext cx="3240000" cy="1800000"/>
+            <a:off x="252000" y="352800"/>
+            <a:ext cx="108000" cy="14400"/>
           </a:xfrm>
           <a:prstGeom prst="rect">
             <a:avLst/>
@@ -3625,109 +3665,447 @@
           </a:p>
         </p:txBody>
       </p:sp>
-      <p:sp>
-        <p:nvSpPr>
-          <p:cNvPr id="3" name="Freeform 2"/>
+      <p:cxnSp>
+        <p:nvCxnSpPr>
+          <p:cNvPr id="4" name="Connector 3"/>
+          <p:cNvCxnSpPr/>
+          <p:nvPr/>
+        </p:nvCxnSpPr>
+        <p:spPr>
+          <a:xfrm>
+            <a:off x="252000" y="453600"/>
+            <a:ext cx="1512000" cy="0"/>
+          </a:xfrm>
+          <a:prstGeom prst="line">
+            <a:avLst/>
+          </a:prstGeom>
+          <a:ln w="3600">
+            <a:solidFill>
+              <a:srgbClr val="EABDC9"/>
+            </a:solidFill>
+          </a:ln>
+        </p:spPr>
+      </p:cxnSp>
+      <p:sp>
+        <p:nvSpPr>
+          <p:cNvPr id="5" name="텍스트"/>
+          <p:cNvSpPr txBox="1"/>
+          <p:nvPr/>
+        </p:nvSpPr>
+        <p:spPr>
+          <a:xfrm>
+            <a:off x="252000" y="507600"/>
+            <a:ext cx="216000" cy="95251"/>
+          </a:xfrm>
+          <a:prstGeom prst="rect">
+            <a:avLst/>
+          </a:prstGeom>
+          <a:noFill/>
+        </p:spPr>
+        <p:txBody>
+          <a:bodyPr wrap="square" lIns="0" rIns="0" tIns="0" bIns="0" anchor="t">
+            <a:spAutoFit/>
+          </a:bodyPr>
+          <a:lstStyle/>
+          <a:p>
+            <a:pPr algn="l">
+              <a:lnSpc>
+                <a:spcPts val="725"/>
+              </a:lnSpc>
+            </a:pPr>
+            <a:r>
+              <a:rPr sz="500" b="1" spc="100">
+                <a:solidFill>
+                  <a:srgbClr val="501429"/>
+                </a:solidFill>
+                <a:latin typeface="맑은 고딕"/>
+                <a:ea typeface="맑은 고딕"/>
+              </a:rPr>
+              <a:t>01</a:t>
+            </a:r>
+          </a:p>
+        </p:txBody>
+      </p:sp>
+      <p:sp>
+        <p:nvSpPr>
+          <p:cNvPr id="6" name="텍스트"/>
+          <p:cNvSpPr txBox="1"/>
+          <p:nvPr/>
+        </p:nvSpPr>
+        <p:spPr>
+          <a:xfrm>
+            <a:off x="489600" y="496800"/>
+            <a:ext cx="1260000" cy="133351"/>
+          </a:xfrm>
+          <a:prstGeom prst="rect">
+            <a:avLst/>
+          </a:prstGeom>
+          <a:noFill/>
+        </p:spPr>
+        <p:txBody>
+          <a:bodyPr wrap="square" lIns="0" rIns="0" tIns="0" bIns="0" anchor="t">
+            <a:spAutoFit/>
+          </a:bodyPr>
+          <a:lstStyle/>
+          <a:p>
+            <a:pPr algn="l">
+              <a:lnSpc>
+                <a:spcPts val="1015"/>
+              </a:lnSpc>
+            </a:pPr>
+            <a:r>
+              <a:rPr sz="700" b="0">
+                <a:solidFill>
+                  <a:srgbClr val="12151C"/>
+                </a:solidFill>
+                <a:latin typeface="맑은 고딕"/>
+                <a:ea typeface="맑은 고딕"/>
+              </a:rPr>
+              <a:t>연금 설계</a:t>
+            </a:r>
+          </a:p>
+        </p:txBody>
+      </p:sp>
+      <p:cxnSp>
+        <p:nvCxnSpPr>
+          <p:cNvPr id="7" name="Connector 6"/>
+          <p:cNvCxnSpPr/>
+          <p:nvPr/>
+        </p:nvCxnSpPr>
+        <p:spPr>
+          <a:xfrm>
+            <a:off x="252000" y="640800"/>
+            <a:ext cx="1512000" cy="0"/>
+          </a:xfrm>
+          <a:prstGeom prst="line">
+            <a:avLst/>
+          </a:prstGeom>
+          <a:ln w="3600">
+            <a:solidFill>
+              <a:srgbClr val="EABDC9"/>
+            </a:solidFill>
+          </a:ln>
+        </p:spPr>
+      </p:cxnSp>
+      <p:sp>
+        <p:nvSpPr>
+          <p:cNvPr id="8" name="텍스트"/>
+          <p:cNvSpPr txBox="1"/>
+          <p:nvPr/>
+        </p:nvSpPr>
+        <p:spPr>
+          <a:xfrm>
+            <a:off x="252000" y="694800"/>
+            <a:ext cx="216000" cy="95251"/>
+          </a:xfrm>
+          <a:prstGeom prst="rect">
+            <a:avLst/>
+          </a:prstGeom>
+          <a:noFill/>
+        </p:spPr>
+        <p:txBody>
+          <a:bodyPr wrap="square" lIns="0" rIns="0" tIns="0" bIns="0" anchor="t">
+            <a:spAutoFit/>
+          </a:bodyPr>
+          <a:lstStyle/>
+          <a:p>
+            <a:pPr algn="l">
+              <a:lnSpc>
+                <a:spcPts val="725"/>
+              </a:lnSpc>
+            </a:pPr>
+            <a:r>
+              <a:rPr sz="500" b="1" spc="100">
+                <a:solidFill>
+                  <a:srgbClr val="501429"/>
+                </a:solidFill>
+                <a:latin typeface="맑은 고딕"/>
+                <a:ea typeface="맑은 고딕"/>
+              </a:rPr>
+              <a:t>02</a:t>
+            </a:r>
+          </a:p>
+        </p:txBody>
+      </p:sp>
+      <p:sp>
+        <p:nvSpPr>
+          <p:cNvPr id="9" name="텍스트"/>
+          <p:cNvSpPr txBox="1"/>
+          <p:nvPr/>
+        </p:nvSpPr>
+        <p:spPr>
+          <a:xfrm>
+            <a:off x="489600" y="684000"/>
+            <a:ext cx="1260000" cy="133351"/>
+          </a:xfrm>
+          <a:prstGeom prst="rect">
+            <a:avLst/>
+          </a:prstGeom>
+          <a:noFill/>
+        </p:spPr>
+        <p:txBody>
+          <a:bodyPr wrap="square" lIns="0" rIns="0" tIns="0" bIns="0" anchor="t">
+            <a:spAutoFit/>
+          </a:bodyPr>
+          <a:lstStyle/>
+          <a:p>
+            <a:pPr algn="l">
+              <a:lnSpc>
+                <a:spcPts val="1015"/>
+              </a:lnSpc>
+            </a:pPr>
+            <a:r>
+              <a:rPr sz="700" b="0">
+                <a:solidFill>
+                  <a:srgbClr val="12151C"/>
+                </a:solidFill>
+                <a:latin typeface="맑은 고딕"/>
+                <a:ea typeface="맑은 고딕"/>
+              </a:rPr>
+              <a:t>투자 상담</a:t>
+            </a:r>
+          </a:p>
+        </p:txBody>
+      </p:sp>
+      <p:cxnSp>
+        <p:nvCxnSpPr>
+          <p:cNvPr id="10" name="Connector 9"/>
+          <p:cNvCxnSpPr/>
+          <p:nvPr/>
+        </p:nvCxnSpPr>
+        <p:spPr>
+          <a:xfrm>
+            <a:off x="252000" y="828000"/>
+            <a:ext cx="1512000" cy="0"/>
+          </a:xfrm>
+          <a:prstGeom prst="line">
+            <a:avLst/>
+          </a:prstGeom>
+          <a:ln w="3600">
+            <a:solidFill>
+              <a:srgbClr val="EABDC9"/>
+            </a:solidFill>
+          </a:ln>
+        </p:spPr>
+      </p:cxnSp>
+      <p:sp>
+        <p:nvSpPr>
+          <p:cNvPr id="11" name="텍스트"/>
+          <p:cNvSpPr txBox="1"/>
+          <p:nvPr/>
+        </p:nvSpPr>
+        <p:spPr>
+          <a:xfrm>
+            <a:off x="252000" y="882000"/>
+            <a:ext cx="216000" cy="95251"/>
+          </a:xfrm>
+          <a:prstGeom prst="rect">
+            <a:avLst/>
+          </a:prstGeom>
+          <a:noFill/>
+        </p:spPr>
+        <p:txBody>
+          <a:bodyPr wrap="square" lIns="0" rIns="0" tIns="0" bIns="0" anchor="t">
+            <a:spAutoFit/>
+          </a:bodyPr>
+          <a:lstStyle/>
+          <a:p>
+            <a:pPr algn="l">
+              <a:lnSpc>
+                <a:spcPts val="725"/>
+              </a:lnSpc>
+            </a:pPr>
+            <a:r>
+              <a:rPr sz="500" b="1" spc="100">
+                <a:solidFill>
+                  <a:srgbClr val="501429"/>
+                </a:solidFill>
+                <a:latin typeface="맑은 고딕"/>
+                <a:ea typeface="맑은 고딕"/>
+              </a:rPr>
+              <a:t>03</a:t>
+            </a:r>
+          </a:p>
+        </p:txBody>
+      </p:sp>
+      <p:sp>
+        <p:nvSpPr>
+          <p:cNvPr id="12" name="텍스트"/>
+          <p:cNvSpPr txBox="1"/>
+          <p:nvPr/>
+        </p:nvSpPr>
+        <p:spPr>
+          <a:xfrm>
+            <a:off x="489600" y="871200"/>
+            <a:ext cx="1260000" cy="133351"/>
+          </a:xfrm>
+          <a:prstGeom prst="rect">
+            <a:avLst/>
+          </a:prstGeom>
+          <a:noFill/>
+        </p:spPr>
+        <p:txBody>
+          <a:bodyPr wrap="square" lIns="0" rIns="0" tIns="0" bIns="0" anchor="t">
+            <a:spAutoFit/>
+          </a:bodyPr>
+          <a:lstStyle/>
+          <a:p>
+            <a:pPr algn="l">
+              <a:lnSpc>
+                <a:spcPts val="1015"/>
+              </a:lnSpc>
+            </a:pPr>
+            <a:r>
+              <a:rPr sz="700" b="0">
+                <a:solidFill>
+                  <a:srgbClr val="12151C"/>
+                </a:solidFill>
+                <a:latin typeface="맑은 고딕"/>
+                <a:ea typeface="맑은 고딕"/>
+              </a:rPr>
+              <a:t>법인 상담</a:t>
+            </a:r>
+          </a:p>
+        </p:txBody>
+      </p:sp>
+      <p:cxnSp>
+        <p:nvCxnSpPr>
+          <p:cNvPr id="13" name="Connector 12"/>
+          <p:cNvCxnSpPr/>
+          <p:nvPr/>
+        </p:nvCxnSpPr>
+        <p:spPr>
+          <a:xfrm>
+            <a:off x="252000" y="1015200"/>
+            <a:ext cx="1512000" cy="0"/>
+          </a:xfrm>
+          <a:prstGeom prst="line">
+            <a:avLst/>
+          </a:prstGeom>
+          <a:ln w="3600">
+            <a:solidFill>
+              <a:srgbClr val="EABDC9"/>
+            </a:solidFill>
+          </a:ln>
+        </p:spPr>
+      </p:cxnSp>
+      <p:sp>
+        <p:nvSpPr>
+          <p:cNvPr id="14" name="텍스트"/>
+          <p:cNvSpPr txBox="1"/>
+          <p:nvPr/>
+        </p:nvSpPr>
+        <p:spPr>
+          <a:xfrm>
+            <a:off x="252000" y="1069200"/>
+            <a:ext cx="216000" cy="95251"/>
+          </a:xfrm>
+          <a:prstGeom prst="rect">
+            <a:avLst/>
+          </a:prstGeom>
+          <a:noFill/>
+        </p:spPr>
+        <p:txBody>
+          <a:bodyPr wrap="square" lIns="0" rIns="0" tIns="0" bIns="0" anchor="t">
+            <a:spAutoFit/>
+          </a:bodyPr>
+          <a:lstStyle/>
+          <a:p>
+            <a:pPr algn="l">
+              <a:lnSpc>
+                <a:spcPts val="725"/>
+              </a:lnSpc>
+            </a:pPr>
+            <a:r>
+              <a:rPr sz="500" b="1" spc="100">
+                <a:solidFill>
+                  <a:srgbClr val="501429"/>
+                </a:solidFill>
+                <a:latin typeface="맑은 고딕"/>
+                <a:ea typeface="맑은 고딕"/>
+              </a:rPr>
+              <a:t>04</a:t>
+            </a:r>
+          </a:p>
+        </p:txBody>
+      </p:sp>
+      <p:sp>
+        <p:nvSpPr>
+          <p:cNvPr id="15" name="텍스트"/>
+          <p:cNvSpPr txBox="1"/>
+          <p:nvPr/>
+        </p:nvSpPr>
+        <p:spPr>
+          <a:xfrm>
+            <a:off x="489600" y="1058400"/>
+            <a:ext cx="1260000" cy="133351"/>
+          </a:xfrm>
+          <a:prstGeom prst="rect">
+            <a:avLst/>
+          </a:prstGeom>
+          <a:noFill/>
+        </p:spPr>
+        <p:txBody>
+          <a:bodyPr wrap="square" lIns="0" rIns="0" tIns="0" bIns="0" anchor="t">
+            <a:spAutoFit/>
+          </a:bodyPr>
+          <a:lstStyle/>
+          <a:p>
+            <a:pPr algn="l">
+              <a:lnSpc>
+                <a:spcPts val="1015"/>
+              </a:lnSpc>
+            </a:pPr>
+            <a:r>
+              <a:rPr sz="700" b="0">
+                <a:solidFill>
+                  <a:srgbClr val="12151C"/>
+                </a:solidFill>
+                <a:latin typeface="맑은 고딕"/>
+                <a:ea typeface="맑은 고딕"/>
+              </a:rPr>
+              <a:t>청약 안내</a:t>
+            </a:r>
+          </a:p>
+        </p:txBody>
+      </p:sp>
+      <p:cxnSp>
+        <p:nvCxnSpPr>
+          <p:cNvPr id="16" name="Connector 15"/>
+          <p:cNvCxnSpPr/>
+          <p:nvPr/>
+        </p:nvCxnSpPr>
+        <p:spPr>
+          <a:xfrm>
+            <a:off x="252000" y="1202400"/>
+            <a:ext cx="1512000" cy="0"/>
+          </a:xfrm>
+          <a:prstGeom prst="line">
+            <a:avLst/>
+          </a:prstGeom>
+          <a:ln w="3600">
+            <a:solidFill>
+              <a:srgbClr val="EABDC9"/>
+            </a:solidFill>
+          </a:ln>
+        </p:spPr>
+      </p:cxnSp>
+      <p:sp>
+        <p:nvSpPr>
+          <p:cNvPr id="17" name="Rectangle 16"/>
           <p:cNvSpPr/>
           <p:nvPr/>
         </p:nvSpPr>
         <p:spPr>
           <a:xfrm>
-            <a:off x="2412000" y="972000"/>
-            <a:ext cx="828000" cy="828000"/>
-          </a:xfrm>
-          <a:custGeom>
+            <a:off x="2088000" y="252000"/>
+            <a:ext cx="900000" cy="1296000"/>
+          </a:xfrm>
+          <a:prstGeom prst="rect">
             <a:avLst/>
-            <a:gdLst/>
-            <a:ahLst/>
-            <a:cxnLst/>
-            <a:rect l="l" t="t" r="r" b="b"/>
-            <a:pathLst>
-              <a:path w="828000" h="828000">
-                <a:moveTo>
-                  <a:pt x="828000" y="828000"/>
-                </a:moveTo>
-                <a:lnTo>
-                  <a:pt x="0" y="828000"/>
-                </a:lnTo>
-                <a:lnTo>
-                  <a:pt x="1773" y="773846"/>
-                </a:lnTo>
-                <a:lnTo>
-                  <a:pt x="7084" y="719924"/>
-                </a:lnTo>
-                <a:lnTo>
-                  <a:pt x="15910" y="666465"/>
-                </a:lnTo>
-                <a:lnTo>
-                  <a:pt x="28213" y="613698"/>
-                </a:lnTo>
-                <a:lnTo>
-                  <a:pt x="43942" y="561848"/>
-                </a:lnTo>
-                <a:lnTo>
-                  <a:pt x="63028" y="511138"/>
-                </a:lnTo>
-                <a:lnTo>
-                  <a:pt x="85389" y="461785"/>
-                </a:lnTo>
-                <a:lnTo>
-                  <a:pt x="110931" y="414000"/>
-                </a:lnTo>
-                <a:lnTo>
-                  <a:pt x="139543" y="367988"/>
-                </a:lnTo>
-                <a:lnTo>
-                  <a:pt x="171103" y="323946"/>
-                </a:lnTo>
-                <a:lnTo>
-                  <a:pt x="205477" y="282062"/>
-                </a:lnTo>
-                <a:lnTo>
-                  <a:pt x="242516" y="242516"/>
-                </a:lnTo>
-                <a:lnTo>
-                  <a:pt x="282062" y="205477"/>
-                </a:lnTo>
-                <a:lnTo>
-                  <a:pt x="323946" y="171103"/>
-                </a:lnTo>
-                <a:lnTo>
-                  <a:pt x="367988" y="139543"/>
-                </a:lnTo>
-                <a:lnTo>
-                  <a:pt x="414000" y="110931"/>
-                </a:lnTo>
-                <a:lnTo>
-                  <a:pt x="461785" y="85389"/>
-                </a:lnTo>
-                <a:lnTo>
-                  <a:pt x="511138" y="63028"/>
-                </a:lnTo>
-                <a:lnTo>
-                  <a:pt x="561848" y="43942"/>
-                </a:lnTo>
-                <a:lnTo>
-                  <a:pt x="613698" y="28213"/>
-                </a:lnTo>
-                <a:lnTo>
-                  <a:pt x="666465" y="15910"/>
-                </a:lnTo>
-                <a:lnTo>
-                  <a:pt x="719924" y="7084"/>
-                </a:lnTo>
-                <a:lnTo>
-                  <a:pt x="773846" y="1773"/>
-                </a:lnTo>
-                <a:lnTo>
-                  <a:pt x="828000" y="0"/>
-                </a:lnTo>
-                <a:close/>
-              </a:path>
-            </a:pathLst>
-          </a:custGeom>
+          </a:prstGeom>
           <a:solidFill>
-            <a:srgbClr val="C54668"/>
+            <a:srgbClr val="B5123E"/>
           </a:solidFill>
           <a:ln>
             <a:noFill/>
@@ -3743,14 +4121,14 @@
       </p:sp>
       <p:sp>
         <p:nvSpPr>
-          <p:cNvPr id="4" name="텍스트"/>
+          <p:cNvPr id="18" name="텍스트"/>
           <p:cNvSpPr txBox="1"/>
           <p:nvPr/>
         </p:nvSpPr>
         <p:spPr>
           <a:xfrm>
-            <a:off x="252000" y="432000"/>
-            <a:ext cx="2304000" cy="720000"/>
+            <a:off x="2196000" y="360000"/>
+            <a:ext cx="684000" cy="95251"/>
           </a:xfrm>
           <a:prstGeom prst="rect">
             <a:avLst/>
@@ -3765,32 +4143,95 @@
           <a:p>
             <a:pPr algn="l">
               <a:lnSpc>
-                <a:spcPts val="1884"/>
+                <a:spcPts val="725"/>
               </a:lnSpc>
             </a:pPr>
             <a:r>
-              <a:rPr sz="1300" b="1">
+              <a:rPr sz="500" b="1" spc="240">
+                <a:solidFill>
+                  <a:srgbClr val="FFFFFF">
+                    <a:alpha val="75000"/>
+                  </a:srgbClr>
+                </a:solidFill>
+                <a:latin typeface="맑은 고딕"/>
+                <a:ea typeface="맑은 고딕"/>
+              </a:rPr>
+              <a:t>INFO</a:t>
+            </a:r>
+          </a:p>
+        </p:txBody>
+      </p:sp>
+      <p:sp>
+        <p:nvSpPr>
+          <p:cNvPr id="19" name="텍스트"/>
+          <p:cNvSpPr txBox="1"/>
+          <p:nvPr/>
+        </p:nvSpPr>
+        <p:spPr>
+          <a:xfrm>
+            <a:off x="2196000" y="504000"/>
+            <a:ext cx="684000" cy="121921"/>
+          </a:xfrm>
+          <a:prstGeom prst="rect">
+            <a:avLst/>
+          </a:prstGeom>
+          <a:noFill/>
+        </p:spPr>
+        <p:txBody>
+          <a:bodyPr wrap="square" lIns="0" rIns="0" tIns="0" bIns="0" anchor="t">
+            <a:spAutoFit/>
+          </a:bodyPr>
+          <a:lstStyle/>
+          <a:p>
+            <a:pPr algn="l">
+              <a:lnSpc>
+                <a:spcPts val="927"/>
+              </a:lnSpc>
+            </a:pPr>
+            <a:r>
+              <a:rPr sz="640" b="1">
                 <a:solidFill>
                   <a:srgbClr val="FFFFFF"/>
                 </a:solidFill>
                 <a:latin typeface="맑은 고딕"/>
                 <a:ea typeface="맑은 고딕"/>
               </a:rPr>
-              <a:t>한 가정 한 가정을 소중히</a:t>
-            </a:r>
-          </a:p>
-        </p:txBody>
-      </p:sp>
-      <p:sp>
-        <p:nvSpPr>
-          <p:cNvPr id="5" name="텍스트"/>
+              <a:t>평일 09:00 – 18:00</a:t>
+            </a:r>
+          </a:p>
+        </p:txBody>
+      </p:sp>
+      <p:cxnSp>
+        <p:nvCxnSpPr>
+          <p:cNvPr id="20" name="Connector 19"/>
+          <p:cNvCxnSpPr/>
+          <p:nvPr/>
+        </p:nvCxnSpPr>
+        <p:spPr>
+          <a:xfrm>
+            <a:off x="2196000" y="770400"/>
+            <a:ext cx="684000" cy="0"/>
+          </a:xfrm>
+          <a:prstGeom prst="line">
+            <a:avLst/>
+          </a:prstGeom>
+          <a:ln w="3600">
+            <a:solidFill>
+              <a:srgbClr val="FFFFFF"/>
+            </a:solidFill>
+          </a:ln>
+        </p:spPr>
+      </p:cxnSp>
+      <p:sp>
+        <p:nvSpPr>
+          <p:cNvPr id="21" name="텍스트"/>
           <p:cNvSpPr txBox="1"/>
           <p:nvPr/>
         </p:nvSpPr>
         <p:spPr>
           <a:xfrm>
-            <a:off x="252000" y="1476000"/>
-            <a:ext cx="1800000" cy="133351"/>
+            <a:off x="2196000" y="849600"/>
+            <a:ext cx="684000" cy="91441"/>
           </a:xfrm>
           <a:prstGeom prst="rect">
             <a:avLst/>
@@ -3805,11 +4246,93 @@
           <a:p>
             <a:pPr algn="l">
               <a:lnSpc>
-                <a:spcPts val="1015"/>
+                <a:spcPts val="696"/>
               </a:lnSpc>
             </a:pPr>
             <a:r>
-              <a:rPr sz="700" b="1" spc="200">
+              <a:rPr sz="480" b="1" spc="140">
+                <a:solidFill>
+                  <a:srgbClr val="FFFFFF">
+                    <a:alpha val="75000"/>
+                  </a:srgbClr>
+                </a:solidFill>
+                <a:latin typeface="맑은 고딕"/>
+                <a:ea typeface="맑은 고딕"/>
+              </a:rPr>
+              <a:t>INSTAGRAM</a:t>
+            </a:r>
+          </a:p>
+        </p:txBody>
+      </p:sp>
+      <p:sp>
+        <p:nvSpPr>
+          <p:cNvPr id="22" name="텍스트"/>
+          <p:cNvSpPr txBox="1"/>
+          <p:nvPr/>
+        </p:nvSpPr>
+        <p:spPr>
+          <a:xfrm>
+            <a:off x="2196000" y="957600"/>
+            <a:ext cx="684000" cy="121921"/>
+          </a:xfrm>
+          <a:prstGeom prst="rect">
+            <a:avLst/>
+          </a:prstGeom>
+          <a:noFill/>
+        </p:spPr>
+        <p:txBody>
+          <a:bodyPr wrap="square" lIns="0" rIns="0" tIns="0" bIns="0" anchor="t">
+            <a:spAutoFit/>
+          </a:bodyPr>
+          <a:lstStyle/>
+          <a:p>
+            <a:pPr algn="l">
+              <a:lnSpc>
+                <a:spcPts val="927"/>
+              </a:lnSpc>
+            </a:pPr>
+            <a:r>
+              <a:rPr sz="640" b="1">
+                <a:solidFill>
+                  <a:srgbClr val="FFFFFF"/>
+                </a:solidFill>
+                <a:latin typeface="맑은 고딕"/>
+                <a:ea typeface="맑은 고딕"/>
+              </a:rPr>
+              <a:t>@아이디</a:t>
+            </a:r>
+          </a:p>
+        </p:txBody>
+      </p:sp>
+      <p:sp>
+        <p:nvSpPr>
+          <p:cNvPr id="23" name="텍스트"/>
+          <p:cNvSpPr txBox="1"/>
+          <p:nvPr/>
+        </p:nvSpPr>
+        <p:spPr>
+          <a:xfrm>
+            <a:off x="2196000" y="1368000"/>
+            <a:ext cx="720000" cy="106681"/>
+          </a:xfrm>
+          <a:prstGeom prst="rect">
+            <a:avLst/>
+          </a:prstGeom>
+          <a:noFill/>
+        </p:spPr>
+        <p:txBody>
+          <a:bodyPr wrap="square" lIns="0" rIns="0" tIns="0" bIns="0" anchor="t">
+            <a:spAutoFit/>
+          </a:bodyPr>
+          <a:lstStyle/>
+          <a:p>
+            <a:pPr algn="l">
+              <a:lnSpc>
+                <a:spcPts val="811"/>
+              </a:lnSpc>
+            </a:pPr>
+            <a:r>
+              <a:rPr sz="560" b="1" spc="80">
                 <a:solidFill>
                   <a:srgbClr val="FFFFFF"/>
                 </a:solidFill>
